--- a/Indonesia_HCI_Plus_2025.pptx
+++ b/Indonesia_HCI_Plus_2025.pptx
@@ -3514,7 +3514,7 @@
               </a:defRPr>
             </a:pPr>
             <a:r>
-              <a:t>Lower Middle Income</a:t>
+              <a:t>Upper Middle Income</a:t>
             </a:r>
           </a:p>
         </p:txBody>
